--- a/DataMining_Group4_PPT.pptx
+++ b/DataMining_Group4_PPT.pptx
@@ -243,7 +243,7 @@
           <a:p>
             <a:fld id="{F8A26648-F114-4402-B049-AA57EA7F2020}" type="datetimeFigureOut">
               <a:rPr lang="en-US" smtClean="0"/>
-              <a:t>12/9/25</a:t>
+              <a:t>12/10/25</a:t>
             </a:fld>
             <a:endParaRPr lang="en-US"/>
           </a:p>
@@ -17387,10 +17387,10 @@
       </p:sp>
       <p:pic>
         <p:nvPicPr>
-          <p:cNvPr id="6" name="Picture 5" descr="A graph with different colored squares&#10;&#10;AI-generated content may be incorrect.">
-            <a:extLst>
-              <a:ext uri="{FF2B5EF4-FFF2-40B4-BE49-F238E27FC236}">
-                <a16:creationId xmlns:a16="http://schemas.microsoft.com/office/drawing/2014/main" id="{4C33FBA3-A324-E33F-F107-A5C950B1E831}"/>
+          <p:cNvPr id="3" name="Picture 2" descr="A graph with different colored squares&#10;&#10;AI-generated content may be incorrect.">
+            <a:extLst>
+              <a:ext uri="{FF2B5EF4-FFF2-40B4-BE49-F238E27FC236}">
+                <a16:creationId xmlns:a16="http://schemas.microsoft.com/office/drawing/2014/main" id="{518F00D7-8CFC-F353-7F44-9C3CEA405E7F}"/>
               </a:ext>
             </a:extLst>
           </p:cNvPr>
@@ -17407,7 +17407,7 @@
         </p:blipFill>
         <p:spPr>
           <a:xfrm>
-            <a:off x="2209800" y="1201995"/>
+            <a:off x="2209800" y="1073555"/>
             <a:ext cx="7772400" cy="5551714"/>
           </a:xfrm>
           <a:prstGeom prst="rect">
@@ -17496,10 +17496,10 @@
       </p:sp>
       <p:pic>
         <p:nvPicPr>
-          <p:cNvPr id="4" name="Picture 3" descr="A graph with different colored squares&#10;&#10;AI-generated content may be incorrect.">
-            <a:extLst>
-              <a:ext uri="{FF2B5EF4-FFF2-40B4-BE49-F238E27FC236}">
-                <a16:creationId xmlns:a16="http://schemas.microsoft.com/office/drawing/2014/main" id="{5236ECBE-B05C-F304-953A-5C62E033192E}"/>
+          <p:cNvPr id="3" name="Picture 2" descr="A graph with different colored squares&#10;&#10;AI-generated content may be incorrect.">
+            <a:extLst>
+              <a:ext uri="{FF2B5EF4-FFF2-40B4-BE49-F238E27FC236}">
+                <a16:creationId xmlns:a16="http://schemas.microsoft.com/office/drawing/2014/main" id="{E0FC5B91-2F41-93B7-CC8D-F77E7F697AD7}"/>
               </a:ext>
             </a:extLst>
           </p:cNvPr>
@@ -17516,7 +17516,7 @@
         </p:blipFill>
         <p:spPr>
           <a:xfrm>
-            <a:off x="2209800" y="1146096"/>
+            <a:off x="2209800" y="1085911"/>
             <a:ext cx="7772400" cy="5551714"/>
           </a:xfrm>
           <a:prstGeom prst="rect">
@@ -17674,6 +17674,36 @@
           </a:p>
         </p:txBody>
       </p:sp>
+      <p:pic>
+        <p:nvPicPr>
+          <p:cNvPr id="4" name="Picture 3">
+            <a:extLst>
+              <a:ext uri="{FF2B5EF4-FFF2-40B4-BE49-F238E27FC236}">
+                <a16:creationId xmlns:a16="http://schemas.microsoft.com/office/drawing/2014/main" id="{8738DF15-B05E-B249-63D2-44CEA115BD07}"/>
+              </a:ext>
+            </a:extLst>
+          </p:cNvPr>
+          <p:cNvPicPr>
+            <a:picLocks noChangeAspect="1"/>
+          </p:cNvPicPr>
+          <p:nvPr/>
+        </p:nvPicPr>
+        <p:blipFill>
+          <a:blip r:embed="rId2"/>
+          <a:stretch>
+            <a:fillRect/>
+          </a:stretch>
+        </p:blipFill>
+        <p:spPr>
+          <a:xfrm>
+            <a:off x="6327648" y="4394708"/>
+            <a:ext cx="4876800" cy="1612900"/>
+          </a:xfrm>
+          <a:prstGeom prst="rect">
+            <a:avLst/>
+          </a:prstGeom>
+        </p:spPr>
+      </p:pic>
     </p:spTree>
     <p:extLst>
       <p:ext uri="{BB962C8B-B14F-4D97-AF65-F5344CB8AC3E}">
@@ -18076,7 +18106,31 @@
               <a:rPr lang="en-IN" sz="2000" dirty="0">
                 <a:latin typeface="+mn-lt"/>
               </a:rPr>
-              <a:t>Random Forest (AUC = 0.93) consistently stayed above the Decision Tree (AUC = 1.00) curve, </a:t>
+              <a:t>Random Forest (AUC </a:t>
+            </a:r>
+            <a:r>
+              <a:rPr lang="en-IN" sz="2000">
+                <a:latin typeface="+mn-lt"/>
+              </a:rPr>
+              <a:t>= 1) </a:t>
+            </a:r>
+            <a:r>
+              <a:rPr lang="en-IN" sz="2000" dirty="0">
+                <a:latin typeface="+mn-lt"/>
+              </a:rPr>
+              <a:t>consistently stayed above the Decision Tree (AUC </a:t>
+            </a:r>
+            <a:r>
+              <a:rPr lang="en-IN" sz="2000">
+                <a:latin typeface="+mn-lt"/>
+              </a:rPr>
+              <a:t>= 0.96) </a:t>
+            </a:r>
+            <a:r>
+              <a:rPr lang="en-IN" sz="2000" dirty="0">
+                <a:latin typeface="+mn-lt"/>
+              </a:rPr>
+              <a:t>curve, </a:t>
             </a:r>
           </a:p>
           <a:p>
@@ -18094,10 +18148,10 @@
       </p:sp>
       <p:pic>
         <p:nvPicPr>
-          <p:cNvPr id="7" name="Picture 6" descr="A graph of a tree&#10;&#10;AI-generated content may be incorrect.">
-            <a:extLst>
-              <a:ext uri="{FF2B5EF4-FFF2-40B4-BE49-F238E27FC236}">
-                <a16:creationId xmlns:a16="http://schemas.microsoft.com/office/drawing/2014/main" id="{D70614BB-D2FA-F6CE-A3A6-79CBBFE595F7}"/>
+          <p:cNvPr id="6" name="Picture 5" descr="A graph of a tree&#10;&#10;AI-generated content may be incorrect.">
+            <a:extLst>
+              <a:ext uri="{FF2B5EF4-FFF2-40B4-BE49-F238E27FC236}">
+                <a16:creationId xmlns:a16="http://schemas.microsoft.com/office/drawing/2014/main" id="{6CB8FED2-6960-01B0-6561-E7B25D45FFF9}"/>
               </a:ext>
             </a:extLst>
           </p:cNvPr>
@@ -18114,8 +18168,8 @@
         </p:blipFill>
         <p:spPr>
           <a:xfrm>
-            <a:off x="581641" y="1311728"/>
-            <a:ext cx="5928360" cy="4234543"/>
+            <a:off x="400334" y="1024128"/>
+            <a:ext cx="6291581" cy="4493986"/>
           </a:xfrm>
           <a:prstGeom prst="rect">
             <a:avLst/>
@@ -20514,6 +20568,26 @@
 </file>
 
 <file path=customXml/item1.xml><?xml version="1.0" encoding="utf-8"?>
+<p:properties xmlns:p="http://schemas.microsoft.com/office/2006/metadata/properties" xmlns:xsi="http://www.w3.org/2001/XMLSchema-instance" xmlns:pc="http://schemas.microsoft.com/office/infopath/2007/PartnerControls">
+  <documentManagement>
+    <_ip_UnifiedCompliancePolicyUIAction xmlns="http://schemas.microsoft.com/sharepoint/v3" xsi:nil="true"/>
+    <Image xmlns="71af3243-3dd4-4a8d-8c0d-dd76da1f02a5">
+      <Url xsi:nil="true"/>
+      <Description xsi:nil="true"/>
+    </Image>
+    <Status xmlns="71af3243-3dd4-4a8d-8c0d-dd76da1f02a5">Not started</Status>
+    <Background xmlns="71af3243-3dd4-4a8d-8c0d-dd76da1f02a5">false</Background>
+    <_ip_UnifiedCompliancePolicyProperties xmlns="http://schemas.microsoft.com/sharepoint/v3" xsi:nil="true"/>
+    <ImageTagsTaxHTField xmlns="71af3243-3dd4-4a8d-8c0d-dd76da1f02a5">
+      <Terms xmlns="http://schemas.microsoft.com/office/infopath/2007/PartnerControls"/>
+    </ImageTagsTaxHTField>
+    <TaxCatchAll xmlns="230e9df3-be65-4c73-a93b-d1236ebd677e" xsi:nil="true"/>
+    <MediaServiceKeyPoints xmlns="71af3243-3dd4-4a8d-8c0d-dd76da1f02a5" xsi:nil="true"/>
+  </documentManagement>
+</p:properties>
+</file>
+
+<file path=customXml/item2.xml><?xml version="1.0" encoding="utf-8"?>
 <ct:contentTypeSchema xmlns:ct="http://schemas.microsoft.com/office/2006/metadata/contentType" xmlns:ma="http://schemas.microsoft.com/office/2006/metadata/properties/metaAttributes" ct:_="" ma:_="" ma:contentTypeName="Document" ma:contentTypeID="0x01010079F111ED35F8CC479449609E8A0923A6" ma:contentTypeVersion="25" ma:contentTypeDescription="Create a new document." ma:contentTypeScope="" ma:versionID="e02306daf00165b375dc6a58966960be">
   <xsd:schema xmlns:xsd="http://www.w3.org/2001/XMLSchema" xmlns:xs="http://www.w3.org/2001/XMLSchema" xmlns:p="http://schemas.microsoft.com/office/2006/metadata/properties" xmlns:ns1="http://schemas.microsoft.com/sharepoint/v3" xmlns:ns2="71af3243-3dd4-4a8d-8c0d-dd76da1f02a5" xmlns:ns3="16c05727-aa75-4e4a-9b5f-8a80a1165891" xmlns:ns4="230e9df3-be65-4c73-a93b-d1236ebd677e" targetNamespace="http://schemas.microsoft.com/office/2006/metadata/properties" ma:root="true" ma:fieldsID="df88fb76bf5f555224557953949c1ec9" ns1:_="" ns2:_="" ns3:_="" ns4:_="">
     <xsd:import namespace="http://schemas.microsoft.com/sharepoint/v3"/>
@@ -20807,26 +20881,6 @@
 </ct:contentTypeSchema>
 </file>
 
-<file path=customXml/item2.xml><?xml version="1.0" encoding="utf-8"?>
-<p:properties xmlns:p="http://schemas.microsoft.com/office/2006/metadata/properties" xmlns:xsi="http://www.w3.org/2001/XMLSchema-instance" xmlns:pc="http://schemas.microsoft.com/office/infopath/2007/PartnerControls">
-  <documentManagement>
-    <_ip_UnifiedCompliancePolicyUIAction xmlns="http://schemas.microsoft.com/sharepoint/v3" xsi:nil="true"/>
-    <Image xmlns="71af3243-3dd4-4a8d-8c0d-dd76da1f02a5">
-      <Url xsi:nil="true"/>
-      <Description xsi:nil="true"/>
-    </Image>
-    <Status xmlns="71af3243-3dd4-4a8d-8c0d-dd76da1f02a5">Not started</Status>
-    <Background xmlns="71af3243-3dd4-4a8d-8c0d-dd76da1f02a5">false</Background>
-    <_ip_UnifiedCompliancePolicyProperties xmlns="http://schemas.microsoft.com/sharepoint/v3" xsi:nil="true"/>
-    <ImageTagsTaxHTField xmlns="71af3243-3dd4-4a8d-8c0d-dd76da1f02a5">
-      <Terms xmlns="http://schemas.microsoft.com/office/infopath/2007/PartnerControls"/>
-    </ImageTagsTaxHTField>
-    <TaxCatchAll xmlns="230e9df3-be65-4c73-a93b-d1236ebd677e" xsi:nil="true"/>
-    <MediaServiceKeyPoints xmlns="71af3243-3dd4-4a8d-8c0d-dd76da1f02a5" xsi:nil="true"/>
-  </documentManagement>
-</p:properties>
-</file>
-
 <file path=customXml/item3.xml><?xml version="1.0" encoding="utf-8"?>
 <?mso-contentType ?>
 <FormTemplates xmlns="http://schemas.microsoft.com/sharepoint/v3/contenttype/forms">
@@ -20837,6 +20891,18 @@
 </file>
 
 <file path=customXml/itemProps1.xml><?xml version="1.0" encoding="utf-8"?>
+<ds:datastoreItem xmlns:ds="http://schemas.openxmlformats.org/officeDocument/2006/customXml" ds:itemID="{609262BC-C013-4067-8A15-9DCD1281E34D}">
+  <ds:schemaRefs>
+    <ds:schemaRef ds:uri="http://schemas.microsoft.com/office/2006/metadata/properties"/>
+    <ds:schemaRef ds:uri="http://schemas.microsoft.com/office/infopath/2007/PartnerControls"/>
+    <ds:schemaRef ds:uri="http://schemas.microsoft.com/sharepoint/v3"/>
+    <ds:schemaRef ds:uri="71af3243-3dd4-4a8d-8c0d-dd76da1f02a5"/>
+    <ds:schemaRef ds:uri="230e9df3-be65-4c73-a93b-d1236ebd677e"/>
+  </ds:schemaRefs>
+</ds:datastoreItem>
+</file>
+
+<file path=customXml/itemProps2.xml><?xml version="1.0" encoding="utf-8"?>
 <ds:datastoreItem xmlns:ds="http://schemas.openxmlformats.org/officeDocument/2006/customXml" ds:itemID="{08AEB05A-1290-41EF-A3CD-520462C3FF16}">
   <ds:schemaRefs>
     <ds:schemaRef ds:uri="http://schemas.microsoft.com/office/2006/metadata/contentType"/>
@@ -20857,18 +20923,6 @@
 </ds:datastoreItem>
 </file>
 
-<file path=customXml/itemProps2.xml><?xml version="1.0" encoding="utf-8"?>
-<ds:datastoreItem xmlns:ds="http://schemas.openxmlformats.org/officeDocument/2006/customXml" ds:itemID="{609262BC-C013-4067-8A15-9DCD1281E34D}">
-  <ds:schemaRefs>
-    <ds:schemaRef ds:uri="http://schemas.microsoft.com/office/2006/metadata/properties"/>
-    <ds:schemaRef ds:uri="http://schemas.microsoft.com/office/infopath/2007/PartnerControls"/>
-    <ds:schemaRef ds:uri="http://schemas.microsoft.com/sharepoint/v3"/>
-    <ds:schemaRef ds:uri="71af3243-3dd4-4a8d-8c0d-dd76da1f02a5"/>
-    <ds:schemaRef ds:uri="230e9df3-be65-4c73-a93b-d1236ebd677e"/>
-  </ds:schemaRefs>
-</ds:datastoreItem>
-</file>
-
 <file path=customXml/itemProps3.xml><?xml version="1.0" encoding="utf-8"?>
 <ds:datastoreItem xmlns:ds="http://schemas.openxmlformats.org/officeDocument/2006/customXml" ds:itemID="{07B04EA5-0343-4579-A177-61682A6D2ED2}">
   <ds:schemaRefs>
